--- a/docs/design/praesentation/plenara-firmenpraesentation.pptx
+++ b/docs/design/praesentation/plenara-firmenpraesentation.pptx
@@ -124,7 +124,7 @@
   <p:extLst>
     <p:ext uri="{521415D9-36F7-43E2-AB2F-B90AF26B5E84}">
       <p14:sectionLst xmlns:p14="http://schemas.microsoft.com/office/powerpoint/2010/main">
-        <p14:section name="Plenara" id="{26b048e4-35bb-749c-1727-94c571b8ad41}">
+        <p14:section name="Plenara" id="{53d43fb8-25a4-6fb8-bc51-50417cd6e39c}">
           <p14:sldIdLst>
             <p14:sldId id="256"/>
             <p14:sldId id="257"/>
@@ -138,7 +138,7 @@
             <p14:sldId id="265"/>
           </p14:sldIdLst>
         </p14:section>
-        <p14:section name="plenara.X" id="{666a210a-35f3-d8c9-2713-285982472809}">
+        <p14:section name="plenara.X" id="{50f31671-32e3-c918-6ce3-dacf6ddd1085}">
           <p14:sldIdLst>
             <p14:sldId id="266"/>
             <p14:sldId id="267"/>

--- a/docs/design/praesentation/plenara-firmenpraesentation.pptx
+++ b/docs/design/praesentation/plenara-firmenpraesentation.pptx
@@ -124,7 +124,7 @@
   <p:extLst>
     <p:ext uri="{521415D9-36F7-43E2-AB2F-B90AF26B5E84}">
       <p14:sectionLst xmlns:p14="http://schemas.microsoft.com/office/powerpoint/2010/main">
-        <p14:section name="Plenara" id="{53d43fb8-25a4-6fb8-bc51-50417cd6e39c}">
+        <p14:section name="Plenara" id="{55a6beff-22d2-b696-9ddb-8c2d016b84a0}">
           <p14:sldIdLst>
             <p14:sldId id="256"/>
             <p14:sldId id="257"/>
@@ -138,7 +138,7 @@
             <p14:sldId id="265"/>
           </p14:sldIdLst>
         </p14:section>
-        <p14:section name="plenara.X" id="{50f31671-32e3-c918-6ce3-dacf6ddd1085}">
+        <p14:section name="plenara.X" id="{d194a513-443e-79bc-4873-61fa683a9d13}">
           <p14:sldIdLst>
             <p14:sldId id="266"/>
             <p14:sldId id="267"/>
@@ -173,7 +173,7 @@
             <a:pPr algn="l">
               <a:defRPr sz="1100" b="0" i="0" u="none" strike="noStrike">
                 <a:solidFill>
-                  <a:srgbClr val="0F172A"/>
+                  <a:srgbClr val="18181B"/>
                 </a:solidFill>
                 <a:latin typeface="+mj-lt"/>
               </a:defRPr>
@@ -181,7 +181,7 @@
             <a:r>
               <a:rPr sz="1100" b="0" i="0" u="none" strike="noStrike">
                 <a:solidFill>
-                  <a:srgbClr val="0F172A"/>
+                  <a:srgbClr val="18181B"/>
                 </a:solidFill>
                 <a:latin typeface="+mj-lt"/>
               </a:rPr>
@@ -216,7 +216,7 @@
           </c:tx>
           <c:spPr>
             <a:solidFill>
-              <a:srgbClr val="0D9488"/>
+              <a:srgbClr val="268478"/>
             </a:solidFill>
             <a:effectLst/>
           </c:spPr>
@@ -230,7 +230,7 @@
                 <a:pPr>
                   <a:defRPr b="0" i="0" strike="noStrike" sz="1000" u="none">
                     <a:solidFill>
-                      <a:srgbClr val="0F172A"/>
+                      <a:srgbClr val="18181B"/>
                     </a:solidFill>
                     <a:latin typeface="+mn-lt"/>
                   </a:defRPr>
@@ -310,7 +310,7 @@
               <a:pPr>
                 <a:defRPr b="0" i="0" strike="noStrike" sz="1000" u="none">
                   <a:solidFill>
-                    <a:srgbClr val="0F172A"/>
+                    <a:srgbClr val="18181B"/>
                   </a:solidFill>
                   <a:latin typeface="+mn-lt"/>
                 </a:defRPr>
@@ -356,7 +356,7 @@
             <a:pPr>
               <a:defRPr sz="1000" b="0" i="0" u="none" strike="noStrike">
                 <a:solidFill>
-                  <a:srgbClr val="64748B"/>
+                  <a:srgbClr val="52525B"/>
                 </a:solidFill>
                 <a:latin typeface="+mn-lt"/>
               </a:defRPr>
@@ -383,7 +383,7 @@
           <c:spPr>
             <a:ln w="6350" cap="flat">
               <a:solidFill>
-                <a:srgbClr val="E2E8F0"/>
+                <a:srgbClr val="E4E4E7"/>
               </a:solidFill>
               <a:prstDash val="solid"/>
               <a:round/>
@@ -408,7 +408,7 @@
             <a:pPr>
               <a:defRPr sz="900" b="0" i="0" u="none" strike="noStrike">
                 <a:solidFill>
-                  <a:srgbClr val="94A3B8"/>
+                  <a:srgbClr val="A1A1AA"/>
                 </a:solidFill>
                 <a:latin typeface="+mn-lt"/>
               </a:defRPr>
@@ -459,7 +459,7 @@
             <a:pPr algn="l">
               <a:defRPr sz="1100" b="0" i="0" u="none" strike="noStrike">
                 <a:solidFill>
-                  <a:srgbClr val="0F172A"/>
+                  <a:srgbClr val="18181B"/>
                 </a:solidFill>
                 <a:latin typeface="+mj-lt"/>
               </a:defRPr>
@@ -467,7 +467,7 @@
             <a:r>
               <a:rPr sz="1100" b="0" i="0" u="none" strike="noStrike">
                 <a:solidFill>
-                  <a:srgbClr val="0F172A"/>
+                  <a:srgbClr val="18181B"/>
                 </a:solidFill>
                 <a:latin typeface="+mj-lt"/>
               </a:rPr>
@@ -502,7 +502,7 @@
           </c:tx>
           <c:spPr>
             <a:solidFill>
-              <a:srgbClr val="0D9488"/>
+              <a:srgbClr val="268478"/>
             </a:solidFill>
             <a:effectLst/>
           </c:spPr>
@@ -516,7 +516,7 @@
                 <a:pPr>
                   <a:defRPr b="0" i="0" strike="noStrike" sz="1000" u="none">
                     <a:solidFill>
-                      <a:srgbClr val="0F172A"/>
+                      <a:srgbClr val="18181B"/>
                     </a:solidFill>
                     <a:latin typeface="+mn-lt"/>
                   </a:defRPr>
@@ -596,7 +596,7 @@
               <a:pPr>
                 <a:defRPr b="0" i="0" strike="noStrike" sz="1000" u="none">
                   <a:solidFill>
-                    <a:srgbClr val="0F172A"/>
+                    <a:srgbClr val="18181B"/>
                   </a:solidFill>
                   <a:latin typeface="+mn-lt"/>
                 </a:defRPr>
@@ -642,7 +642,7 @@
             <a:pPr>
               <a:defRPr sz="1000" b="0" i="0" u="none" strike="noStrike">
                 <a:solidFill>
-                  <a:srgbClr val="64748B"/>
+                  <a:srgbClr val="52525B"/>
                 </a:solidFill>
                 <a:latin typeface="+mn-lt"/>
               </a:defRPr>
@@ -668,7 +668,7 @@
           <c:spPr>
             <a:ln w="6350" cap="flat">
               <a:solidFill>
-                <a:srgbClr val="E2E8F0"/>
+                <a:srgbClr val="E4E4E7"/>
               </a:solidFill>
               <a:prstDash val="solid"/>
               <a:round/>
@@ -693,7 +693,7 @@
             <a:pPr>
               <a:defRPr sz="900" b="0" i="0" u="none" strike="noStrike">
                 <a:solidFill>
-                  <a:srgbClr val="94A3B8"/>
+                  <a:srgbClr val="A1A1AA"/>
                 </a:solidFill>
                 <a:latin typeface="+mn-lt"/>
               </a:defRPr>
@@ -2733,7 +2733,7 @@
         <p:spPr>
           <a:xfrm>
             <a:off x="457200" y="4773168"/>
-            <a:ext cx="542536" cy="182880"/>
+            <a:ext cx="493160" cy="182880"/>
           </a:xfrm>
           <a:prstGeom prst="rect">
             <a:avLst/>
@@ -2851,7 +2851,7 @@
             <a:lvl1pPr>
               <a:defRPr sz="900">
                 <a:solidFill>
-                  <a:srgbClr val="94A3B8"/>
+                  <a:srgbClr val="A1A1AA"/>
                 </a:solidFill>
               </a:defRPr>
             </a:lvl1pPr>
@@ -3101,7 +3101,7 @@
             <a:lvl1pPr>
               <a:defRPr sz="900">
                 <a:solidFill>
-                  <a:srgbClr val="94A3B8"/>
+                  <a:srgbClr val="A1A1AA"/>
                 </a:solidFill>
               </a:defRPr>
             </a:lvl1pPr>
@@ -4037,13 +4037,13 @@
           </a:solidFill>
           <a:ln w="9525">
             <a:solidFill>
-              <a:srgbClr val="E8EDF2"/>
+              <a:srgbClr val="E4E4E7"/>
             </a:solidFill>
             <a:prstDash val="solid"/>
           </a:ln>
           <a:effectLst>
             <a:outerShdw sx="100000" sy="100000" kx="0" ky="0" algn="bl" rotWithShape="0" blurRad="127000" dist="38100" dir="5400000">
-              <a:srgbClr val="0F172A">
+              <a:srgbClr val="18181B">
                 <a:alpha val="10000"/>
               </a:srgbClr>
             </a:outerShdw>
@@ -4104,7 +4104,7 @@
             <a:lvl1pPr>
               <a:defRPr sz="900">
                 <a:solidFill>
-                  <a:srgbClr val="94A3B8"/>
+                  <a:srgbClr val="A1A1AA"/>
                 </a:solidFill>
               </a:defRPr>
             </a:lvl1pPr>
@@ -4200,7 +4200,7 @@
         <p:spPr>
           <a:xfrm>
             <a:off x="658368" y="1920240"/>
-            <a:ext cx="3108960" cy="1152906"/>
+            <a:ext cx="3108960" cy="1047979"/>
           </a:xfrm>
           <a:prstGeom prst="rect">
             <a:avLst/>
@@ -5538,7 +5538,7 @@
             <a:lvl1pPr>
               <a:defRPr sz="900">
                 <a:solidFill>
-                  <a:srgbClr val="94A3B8"/>
+                  <a:srgbClr val="A1A1AA"/>
                 </a:solidFill>
               </a:defRPr>
             </a:lvl1pPr>
@@ -6625,7 +6625,7 @@
             <a:lvl1pPr>
               <a:defRPr sz="900">
                 <a:solidFill>
-                  <a:srgbClr val="94A3B8"/>
+                  <a:srgbClr val="A1A1AA"/>
                 </a:solidFill>
               </a:defRPr>
             </a:lvl1pPr>
@@ -7270,7 +7270,7 @@
             <a:lvl1pPr>
               <a:defRPr sz="900">
                 <a:solidFill>
-                  <a:srgbClr val="94A3B8"/>
+                  <a:srgbClr val="A1A1AA"/>
                 </a:solidFill>
               </a:defRPr>
             </a:lvl1pPr>
@@ -7410,13 +7410,13 @@
           </a:solidFill>
           <a:ln w="9525">
             <a:solidFill>
-              <a:srgbClr val="E8EDF2"/>
+              <a:srgbClr val="E4E4E7"/>
             </a:solidFill>
             <a:prstDash val="solid"/>
           </a:ln>
           <a:effectLst>
             <a:outerShdw sx="100000" sy="100000" kx="0" ky="0" algn="bl" rotWithShape="0" blurRad="127000" dist="38100" dir="5400000">
-              <a:srgbClr val="0F172A">
+              <a:srgbClr val="18181B">
                 <a:alpha val="10000"/>
               </a:srgbClr>
             </a:outerShdw>
@@ -8314,7 +8314,7 @@
             <a:lvl1pPr>
               <a:defRPr sz="900">
                 <a:solidFill>
-                  <a:srgbClr val="94A3B8"/>
+                  <a:srgbClr val="A1A1AA"/>
                 </a:solidFill>
               </a:defRPr>
             </a:lvl1pPr>
@@ -9279,7 +9279,7 @@
             <a:lvl1pPr>
               <a:defRPr sz="900">
                 <a:solidFill>
-                  <a:srgbClr val="94A3B8"/>
+                  <a:srgbClr val="A1A1AA"/>
                 </a:solidFill>
               </a:defRPr>
             </a:lvl1pPr>
@@ -10943,7 +10943,7 @@
             <a:lvl1pPr>
               <a:defRPr sz="900">
                 <a:solidFill>
-                  <a:srgbClr val="94A3B8"/>
+                  <a:srgbClr val="A1A1AA"/>
                 </a:solidFill>
               </a:defRPr>
             </a:lvl1pPr>
@@ -11857,7 +11857,7 @@
             <a:lvl1pPr>
               <a:defRPr sz="900">
                 <a:solidFill>
-                  <a:srgbClr val="94A3B8"/>
+                  <a:srgbClr val="A1A1AA"/>
                 </a:solidFill>
               </a:defRPr>
             </a:lvl1pPr>
@@ -13008,7 +13008,7 @@
             <a:lvl1pPr>
               <a:defRPr sz="900">
                 <a:solidFill>
-                  <a:srgbClr val="94A3B8"/>
+                  <a:srgbClr val="A1A1AA"/>
                 </a:solidFill>
               </a:defRPr>
             </a:lvl1pPr>
@@ -14377,7 +14377,7 @@
             <a:lvl1pPr>
               <a:defRPr sz="900">
                 <a:solidFill>
-                  <a:srgbClr val="94A3B8"/>
+                  <a:srgbClr val="A1A1AA"/>
                 </a:solidFill>
               </a:defRPr>
             </a:lvl1pPr>
@@ -15554,7 +15554,7 @@
             <a:lvl1pPr>
               <a:defRPr sz="900">
                 <a:solidFill>
-                  <a:srgbClr val="94A3B8"/>
+                  <a:srgbClr val="A1A1AA"/>
                 </a:solidFill>
               </a:defRPr>
             </a:lvl1pPr>
@@ -16234,13 +16234,13 @@
           </a:solidFill>
           <a:ln w="9525">
             <a:solidFill>
-              <a:srgbClr val="E8EDF2"/>
+              <a:srgbClr val="E4E4E7"/>
             </a:solidFill>
             <a:prstDash val="solid"/>
           </a:ln>
           <a:effectLst>
             <a:outerShdw sx="100000" sy="100000" kx="0" ky="0" algn="bl" rotWithShape="0" blurRad="127000" dist="38100" dir="5400000">
-              <a:srgbClr val="0F172A">
+              <a:srgbClr val="18181B">
                 <a:alpha val="10000"/>
               </a:srgbClr>
             </a:outerShdw>
@@ -16301,7 +16301,7 @@
             <a:lvl1pPr>
               <a:defRPr sz="900">
                 <a:solidFill>
-                  <a:srgbClr val="94A3B8"/>
+                  <a:srgbClr val="A1A1AA"/>
                 </a:solidFill>
               </a:defRPr>
             </a:lvl1pPr>
@@ -16441,13 +16441,13 @@
           </a:solidFill>
           <a:ln w="9525">
             <a:solidFill>
-              <a:srgbClr val="E8EDF2"/>
+              <a:srgbClr val="E4E4E7"/>
             </a:solidFill>
             <a:prstDash val="solid"/>
           </a:ln>
           <a:effectLst>
             <a:outerShdw sx="100000" sy="100000" kx="0" ky="0" algn="bl" rotWithShape="0" blurRad="127000" dist="38100" dir="5400000">
-              <a:srgbClr val="0F172A">
+              <a:srgbClr val="18181B">
                 <a:alpha val="10000"/>
               </a:srgbClr>
             </a:outerShdw>
@@ -16880,7 +16880,7 @@
             <a:lvl1pPr>
               <a:defRPr sz="900">
                 <a:solidFill>
-                  <a:srgbClr val="94A3B8"/>
+                  <a:srgbClr val="A1A1AA"/>
                 </a:solidFill>
               </a:defRPr>
             </a:lvl1pPr>
@@ -17020,13 +17020,13 @@
           </a:solidFill>
           <a:ln w="9525">
             <a:solidFill>
-              <a:srgbClr val="E8EDF2"/>
+              <a:srgbClr val="E4E4E7"/>
             </a:solidFill>
             <a:prstDash val="solid"/>
           </a:ln>
           <a:effectLst>
             <a:outerShdw sx="100000" sy="100000" kx="0" ky="0" algn="bl" rotWithShape="0" blurRad="127000" dist="38100" dir="5400000">
-              <a:srgbClr val="0F172A">
+              <a:srgbClr val="18181B">
                 <a:alpha val="10000"/>
               </a:srgbClr>
             </a:outerShdw>
@@ -17487,7 +17487,7 @@
             <a:lvl1pPr>
               <a:defRPr sz="900">
                 <a:solidFill>
-                  <a:srgbClr val="94A3B8"/>
+                  <a:srgbClr val="A1A1AA"/>
                 </a:solidFill>
               </a:defRPr>
             </a:lvl1pPr>
@@ -17515,40 +17515,40 @@
   <a:themeElements>
     <a:clrScheme name="Plenara">
       <a:dk1>
-        <a:srgbClr val="0F172A"/>
+        <a:srgbClr val="18181B"/>
       </a:dk1>
       <a:lt1>
         <a:srgbClr val="FFFFFF"/>
       </a:lt1>
       <a:dk2>
-        <a:srgbClr val="0B1220"/>
+        <a:srgbClr val="191E1D"/>
       </a:dk2>
       <a:lt2>
-        <a:srgbClr val="F8FAFC"/>
+        <a:srgbClr val="F4F4F5"/>
       </a:lt2>
       <a:accent1>
-        <a:srgbClr val="0D9488"/>
+        <a:srgbClr val="268478"/>
       </a:accent1>
       <a:accent2>
-        <a:srgbClr val="0F766E"/>
+        <a:srgbClr val="1F7065"/>
       </a:accent2>
       <a:accent3>
-        <a:srgbClr val="64748B"/>
+        <a:srgbClr val="52525B"/>
       </a:accent3>
       <a:accent4>
-        <a:srgbClr val="94A3B8"/>
+        <a:srgbClr val="A1A1AA"/>
       </a:accent4>
       <a:accent5>
-        <a:srgbClr val="F0FDFA"/>
+        <a:srgbClr val="E6F3F1"/>
       </a:accent5>
       <a:accent6>
-        <a:srgbClr val="E2E8F0"/>
+        <a:srgbClr val="E4E4E7"/>
       </a:accent6>
       <a:hlink>
-        <a:srgbClr val="0F766E"/>
+        <a:srgbClr val="29467A"/>
       </a:hlink>
       <a:folHlink>
-        <a:srgbClr val="0F766E"/>
+        <a:srgbClr val="29467A"/>
       </a:folHlink>
     </a:clrScheme>
     <a:fontScheme name="Office">

--- a/docs/design/praesentation/plenara-firmenpraesentation.pptx
+++ b/docs/design/praesentation/plenara-firmenpraesentation.pptx
@@ -124,7 +124,7 @@
   <p:extLst>
     <p:ext uri="{521415D9-36F7-43E2-AB2F-B90AF26B5E84}">
       <p14:sectionLst xmlns:p14="http://schemas.microsoft.com/office/powerpoint/2010/main">
-        <p14:section name="Plenara" id="{55a6beff-22d2-b696-9ddb-8c2d016b84a0}">
+        <p14:section name="Plenara" id="{63b432c0-2a86-7265-5ebe-9db6062a4aa5}">
           <p14:sldIdLst>
             <p14:sldId id="256"/>
             <p14:sldId id="257"/>
@@ -138,7 +138,7 @@
             <p14:sldId id="265"/>
           </p14:sldIdLst>
         </p14:section>
-        <p14:section name="plenara.X" id="{d194a513-443e-79bc-4873-61fa683a9d13}">
+        <p14:section name="plenara.X" id="{3ac93ea1-49a0-4203-8ba4-dedc6b2b3b81}">
           <p14:sldIdLst>
             <p14:sldId id="266"/>
             <p14:sldId id="267"/>
